--- a/HaladoC#Demo.pptx
+++ b/HaladoC#Demo.pptx
@@ -8,8 +8,9 @@
     <p:sldId id="256" r:id="rId2"/>
     <p:sldId id="257" r:id="rId3"/>
     <p:sldId id="258" r:id="rId4"/>
-    <p:sldId id="260" r:id="rId5"/>
-    <p:sldId id="259" r:id="rId6"/>
+    <p:sldId id="261" r:id="rId5"/>
+    <p:sldId id="260" r:id="rId6"/>
+    <p:sldId id="259" r:id="rId7"/>
   </p:sldIdLst>
   <p:sldSz cx="12192000" cy="6858000"/>
   <p:notesSz cx="6858000" cy="9144000"/>
@@ -108,6 +109,11 @@
       </a:defRPr>
     </a:lvl9pPr>
   </p:defaultTextStyle>
+  <p:extLst>
+    <p:ext uri="{EFAFB233-063F-42B5-8137-9DF3F51BA10A}">
+      <p15:sldGuideLst xmlns:p15="http://schemas.microsoft.com/office/powerpoint/2012/main"/>
+    </p:ext>
+  </p:extLst>
 </p:presentation>
 </file>
 
@@ -258,7 +264,7 @@
           <a:p>
             <a:fld id="{FB5A2253-BBB7-4B79-BA99-3A2583E1B15B}" type="datetimeFigureOut">
               <a:rPr lang="hu-HU" smtClean="0"/>
-              <a:t>2026. 04. 25.</a:t>
+              <a:t>2026. 04. 28.</a:t>
             </a:fld>
             <a:endParaRPr lang="hu-HU"/>
           </a:p>
@@ -456,7 +462,7 @@
           <a:p>
             <a:fld id="{FB5A2253-BBB7-4B79-BA99-3A2583E1B15B}" type="datetimeFigureOut">
               <a:rPr lang="hu-HU" smtClean="0"/>
-              <a:t>2026. 04. 25.</a:t>
+              <a:t>2026. 04. 28.</a:t>
             </a:fld>
             <a:endParaRPr lang="hu-HU"/>
           </a:p>
@@ -664,7 +670,7 @@
           <a:p>
             <a:fld id="{FB5A2253-BBB7-4B79-BA99-3A2583E1B15B}" type="datetimeFigureOut">
               <a:rPr lang="hu-HU" smtClean="0"/>
-              <a:t>2026. 04. 25.</a:t>
+              <a:t>2026. 04. 28.</a:t>
             </a:fld>
             <a:endParaRPr lang="hu-HU"/>
           </a:p>
@@ -862,7 +868,7 @@
           <a:p>
             <a:fld id="{FB5A2253-BBB7-4B79-BA99-3A2583E1B15B}" type="datetimeFigureOut">
               <a:rPr lang="hu-HU" smtClean="0"/>
-              <a:t>2026. 04. 25.</a:t>
+              <a:t>2026. 04. 28.</a:t>
             </a:fld>
             <a:endParaRPr lang="hu-HU"/>
           </a:p>
@@ -1137,7 +1143,7 @@
           <a:p>
             <a:fld id="{FB5A2253-BBB7-4B79-BA99-3A2583E1B15B}" type="datetimeFigureOut">
               <a:rPr lang="hu-HU" smtClean="0"/>
-              <a:t>2026. 04. 25.</a:t>
+              <a:t>2026. 04. 28.</a:t>
             </a:fld>
             <a:endParaRPr lang="hu-HU"/>
           </a:p>
@@ -1402,7 +1408,7 @@
           <a:p>
             <a:fld id="{FB5A2253-BBB7-4B79-BA99-3A2583E1B15B}" type="datetimeFigureOut">
               <a:rPr lang="hu-HU" smtClean="0"/>
-              <a:t>2026. 04. 25.</a:t>
+              <a:t>2026. 04. 28.</a:t>
             </a:fld>
             <a:endParaRPr lang="hu-HU"/>
           </a:p>
@@ -1814,7 +1820,7 @@
           <a:p>
             <a:fld id="{FB5A2253-BBB7-4B79-BA99-3A2583E1B15B}" type="datetimeFigureOut">
               <a:rPr lang="hu-HU" smtClean="0"/>
-              <a:t>2026. 04. 25.</a:t>
+              <a:t>2026. 04. 28.</a:t>
             </a:fld>
             <a:endParaRPr lang="hu-HU"/>
           </a:p>
@@ -1955,7 +1961,7 @@
           <a:p>
             <a:fld id="{FB5A2253-BBB7-4B79-BA99-3A2583E1B15B}" type="datetimeFigureOut">
               <a:rPr lang="hu-HU" smtClean="0"/>
-              <a:t>2026. 04. 25.</a:t>
+              <a:t>2026. 04. 28.</a:t>
             </a:fld>
             <a:endParaRPr lang="hu-HU"/>
           </a:p>
@@ -2068,7 +2074,7 @@
           <a:p>
             <a:fld id="{FB5A2253-BBB7-4B79-BA99-3A2583E1B15B}" type="datetimeFigureOut">
               <a:rPr lang="hu-HU" smtClean="0"/>
-              <a:t>2026. 04. 25.</a:t>
+              <a:t>2026. 04. 28.</a:t>
             </a:fld>
             <a:endParaRPr lang="hu-HU"/>
           </a:p>
@@ -2379,7 +2385,7 @@
           <a:p>
             <a:fld id="{FB5A2253-BBB7-4B79-BA99-3A2583E1B15B}" type="datetimeFigureOut">
               <a:rPr lang="hu-HU" smtClean="0"/>
-              <a:t>2026. 04. 25.</a:t>
+              <a:t>2026. 04. 28.</a:t>
             </a:fld>
             <a:endParaRPr lang="hu-HU"/>
           </a:p>
@@ -2667,7 +2673,7 @@
           <a:p>
             <a:fld id="{FB5A2253-BBB7-4B79-BA99-3A2583E1B15B}" type="datetimeFigureOut">
               <a:rPr lang="hu-HU" smtClean="0"/>
-              <a:t>2026. 04. 25.</a:t>
+              <a:t>2026. 04. 28.</a:t>
             </a:fld>
             <a:endParaRPr lang="hu-HU"/>
           </a:p>
@@ -2908,7 +2914,7 @@
           <a:p>
             <a:fld id="{FB5A2253-BBB7-4B79-BA99-3A2583E1B15B}" type="datetimeFigureOut">
               <a:rPr lang="hu-HU" smtClean="0"/>
-              <a:t>2026. 04. 25.</a:t>
+              <a:t>2026. 04. 28.</a:t>
             </a:fld>
             <a:endParaRPr lang="hu-HU"/>
           </a:p>
@@ -4956,6 +4962,180 @@
         <p:cNvPr id="1" name="">
           <a:extLst>
             <a:ext uri="{FF2B5EF4-FFF2-40B4-BE49-F238E27FC236}">
+              <a16:creationId xmlns:a16="http://schemas.microsoft.com/office/drawing/2014/main" id="{3C4712ED-FB82-BE20-878B-88BA0C0F5918}"/>
+            </a:ext>
+          </a:extLst>
+        </p:cNvPr>
+        <p:cNvGrpSpPr/>
+        <p:nvPr/>
+      </p:nvGrpSpPr>
+      <p:grpSpPr>
+        <a:xfrm>
+          <a:off x="0" y="0"/>
+          <a:ext cx="0" cy="0"/>
+          <a:chOff x="0" y="0"/>
+          <a:chExt cx="0" cy="0"/>
+        </a:xfrm>
+      </p:grpSpPr>
+      <p:sp>
+        <p:nvSpPr>
+          <p:cNvPr id="3" name="Cím 2">
+            <a:extLst>
+              <a:ext uri="{FF2B5EF4-FFF2-40B4-BE49-F238E27FC236}">
+                <a16:creationId xmlns:a16="http://schemas.microsoft.com/office/drawing/2014/main" id="{0DD07FCA-0753-BE7D-6506-951924DF1F2B}"/>
+              </a:ext>
+            </a:extLst>
+          </p:cNvPr>
+          <p:cNvSpPr>
+            <a:spLocks noGrp="1"/>
+          </p:cNvSpPr>
+          <p:nvPr>
+            <p:ph type="title"/>
+          </p:nvPr>
+        </p:nvSpPr>
+        <p:spPr/>
+        <p:txBody>
+          <a:bodyPr/>
+          <a:lstStyle/>
+          <a:p>
+            <a:r>
+              <a:rPr lang="hu-HU" noProof="0" dirty="0">
+                <a:solidFill>
+                  <a:schemeClr val="bg1"/>
+                </a:solidFill>
+              </a:rPr>
+              <a:t>Fejlesztési lehetőségek</a:t>
+            </a:r>
+          </a:p>
+        </p:txBody>
+      </p:sp>
+      <p:sp>
+        <p:nvSpPr>
+          <p:cNvPr id="4" name="Tartalom helye 3">
+            <a:extLst>
+              <a:ext uri="{FF2B5EF4-FFF2-40B4-BE49-F238E27FC236}">
+                <a16:creationId xmlns:a16="http://schemas.microsoft.com/office/drawing/2014/main" id="{2AF3B06E-FA9D-31CE-0C92-E37A53EA1ED2}"/>
+              </a:ext>
+            </a:extLst>
+          </p:cNvPr>
+          <p:cNvSpPr>
+            <a:spLocks noGrp="1"/>
+          </p:cNvSpPr>
+          <p:nvPr>
+            <p:ph idx="1"/>
+          </p:nvPr>
+        </p:nvSpPr>
+        <p:spPr/>
+        <p:txBody>
+          <a:bodyPr/>
+          <a:lstStyle/>
+          <a:p>
+            <a:r>
+              <a:rPr lang="hu-HU" noProof="0" dirty="0">
+                <a:solidFill>
+                  <a:schemeClr val="bg1"/>
+                </a:solidFill>
+              </a:rPr>
+              <a:t>Képernyő méret és</a:t>
+            </a:r>
+            <a:r>
+              <a:rPr lang="hu-HU" dirty="0">
+                <a:solidFill>
+                  <a:schemeClr val="bg1"/>
+                </a:solidFill>
+              </a:rPr>
+              <a:t> nagyítás alapján állítani a minimum ablakméretet</a:t>
+            </a:r>
+          </a:p>
+          <a:p>
+            <a:r>
+              <a:rPr lang="hu-HU" noProof="0" dirty="0">
+                <a:solidFill>
+                  <a:schemeClr val="bg1"/>
+                </a:solidFill>
+              </a:rPr>
+              <a:t>Felbontáshoz alapértelmezetten</a:t>
+            </a:r>
+            <a:r>
+              <a:rPr lang="hu-HU" dirty="0">
+                <a:solidFill>
+                  <a:schemeClr val="bg1"/>
+                </a:solidFill>
+              </a:rPr>
+              <a:t> beállítani a vonalvastagságot</a:t>
+            </a:r>
+          </a:p>
+          <a:p>
+            <a:r>
+              <a:rPr lang="hu-HU" dirty="0">
+                <a:solidFill>
+                  <a:schemeClr val="bg1"/>
+                </a:solidFill>
+              </a:rPr>
+              <a:t>Számítógép választási logikájának fejlesztése</a:t>
+            </a:r>
+          </a:p>
+          <a:p>
+            <a:r>
+              <a:rPr lang="hu-HU" noProof="0" dirty="0">
+                <a:solidFill>
+                  <a:schemeClr val="bg1"/>
+                </a:solidFill>
+              </a:rPr>
+              <a:t>Enter lenyomására való bejelentkezés</a:t>
+            </a:r>
+          </a:p>
+        </p:txBody>
+      </p:sp>
+    </p:spTree>
+    <p:extLst>
+      <p:ext uri="{BB962C8B-B14F-4D97-AF65-F5344CB8AC3E}">
+        <p14:creationId xmlns:p14="http://schemas.microsoft.com/office/powerpoint/2010/main" val="4150720348"/>
+      </p:ext>
+    </p:extLst>
+  </p:cSld>
+  <p:clrMapOvr>
+    <a:masterClrMapping/>
+  </p:clrMapOvr>
+</p:sld>
+</file>
+
+<file path=ppt/slides/slide5.xml><?xml version="1.0" encoding="utf-8"?>
+<p:sld xmlns:a="http://schemas.openxmlformats.org/drawingml/2006/main" xmlns:r="http://schemas.openxmlformats.org/officeDocument/2006/relationships" xmlns:p="http://schemas.openxmlformats.org/presentationml/2006/main">
+  <p:cSld>
+    <p:bg>
+      <p:bgPr>
+        <a:gradFill flip="none" rotWithShape="1">
+          <a:gsLst>
+            <a:gs pos="0">
+              <a:schemeClr val="accent1">
+                <a:lumMod val="60000"/>
+                <a:lumOff val="40000"/>
+              </a:schemeClr>
+            </a:gs>
+            <a:gs pos="13000">
+              <a:schemeClr val="accent1"/>
+            </a:gs>
+            <a:gs pos="30000">
+              <a:schemeClr val="accent1">
+                <a:lumMod val="75000"/>
+              </a:schemeClr>
+            </a:gs>
+            <a:gs pos="100000">
+              <a:schemeClr val="tx1"/>
+            </a:gs>
+          </a:gsLst>
+          <a:lin ang="8100000" scaled="1"/>
+          <a:tileRect/>
+        </a:gradFill>
+        <a:effectLst/>
+      </p:bgPr>
+    </p:bg>
+    <p:spTree>
+      <p:nvGrpSpPr>
+        <p:cNvPr id="1" name="">
+          <a:extLst>
+            <a:ext uri="{FF2B5EF4-FFF2-40B4-BE49-F238E27FC236}">
               <a16:creationId xmlns:a16="http://schemas.microsoft.com/office/drawing/2014/main" id="{4E176B2D-2875-B772-10DE-22E90EE2ADB7}"/>
             </a:ext>
           </a:extLst>
@@ -5021,7 +5201,7 @@
 </p:sld>
 </file>
 
-<file path=ppt/slides/slide5.xml><?xml version="1.0" encoding="utf-8"?>
+<file path=ppt/slides/slide6.xml><?xml version="1.0" encoding="utf-8"?>
 <p:sld xmlns:a="http://schemas.openxmlformats.org/drawingml/2006/main" xmlns:r="http://schemas.openxmlformats.org/officeDocument/2006/relationships" xmlns:p="http://schemas.openxmlformats.org/presentationml/2006/main">
   <p:cSld>
     <p:bg>

--- a/HaladoC#Demo.pptx
+++ b/HaladoC#Demo.pptx
@@ -264,7 +264,7 @@
           <a:p>
             <a:fld id="{FB5A2253-BBB7-4B79-BA99-3A2583E1B15B}" type="datetimeFigureOut">
               <a:rPr lang="hu-HU" smtClean="0"/>
-              <a:t>2026. 04. 28.</a:t>
+              <a:t>2026. 05. 04.</a:t>
             </a:fld>
             <a:endParaRPr lang="hu-HU"/>
           </a:p>
@@ -462,7 +462,7 @@
           <a:p>
             <a:fld id="{FB5A2253-BBB7-4B79-BA99-3A2583E1B15B}" type="datetimeFigureOut">
               <a:rPr lang="hu-HU" smtClean="0"/>
-              <a:t>2026. 04. 28.</a:t>
+              <a:t>2026. 05. 04.</a:t>
             </a:fld>
             <a:endParaRPr lang="hu-HU"/>
           </a:p>
@@ -670,7 +670,7 @@
           <a:p>
             <a:fld id="{FB5A2253-BBB7-4B79-BA99-3A2583E1B15B}" type="datetimeFigureOut">
               <a:rPr lang="hu-HU" smtClean="0"/>
-              <a:t>2026. 04. 28.</a:t>
+              <a:t>2026. 05. 04.</a:t>
             </a:fld>
             <a:endParaRPr lang="hu-HU"/>
           </a:p>
@@ -868,7 +868,7 @@
           <a:p>
             <a:fld id="{FB5A2253-BBB7-4B79-BA99-3A2583E1B15B}" type="datetimeFigureOut">
               <a:rPr lang="hu-HU" smtClean="0"/>
-              <a:t>2026. 04. 28.</a:t>
+              <a:t>2026. 05. 04.</a:t>
             </a:fld>
             <a:endParaRPr lang="hu-HU"/>
           </a:p>
@@ -1143,7 +1143,7 @@
           <a:p>
             <a:fld id="{FB5A2253-BBB7-4B79-BA99-3A2583E1B15B}" type="datetimeFigureOut">
               <a:rPr lang="hu-HU" smtClean="0"/>
-              <a:t>2026. 04. 28.</a:t>
+              <a:t>2026. 05. 04.</a:t>
             </a:fld>
             <a:endParaRPr lang="hu-HU"/>
           </a:p>
@@ -1408,7 +1408,7 @@
           <a:p>
             <a:fld id="{FB5A2253-BBB7-4B79-BA99-3A2583E1B15B}" type="datetimeFigureOut">
               <a:rPr lang="hu-HU" smtClean="0"/>
-              <a:t>2026. 04. 28.</a:t>
+              <a:t>2026. 05. 04.</a:t>
             </a:fld>
             <a:endParaRPr lang="hu-HU"/>
           </a:p>
@@ -1820,7 +1820,7 @@
           <a:p>
             <a:fld id="{FB5A2253-BBB7-4B79-BA99-3A2583E1B15B}" type="datetimeFigureOut">
               <a:rPr lang="hu-HU" smtClean="0"/>
-              <a:t>2026. 04. 28.</a:t>
+              <a:t>2026. 05. 04.</a:t>
             </a:fld>
             <a:endParaRPr lang="hu-HU"/>
           </a:p>
@@ -1961,7 +1961,7 @@
           <a:p>
             <a:fld id="{FB5A2253-BBB7-4B79-BA99-3A2583E1B15B}" type="datetimeFigureOut">
               <a:rPr lang="hu-HU" smtClean="0"/>
-              <a:t>2026. 04. 28.</a:t>
+              <a:t>2026. 05. 04.</a:t>
             </a:fld>
             <a:endParaRPr lang="hu-HU"/>
           </a:p>
@@ -2074,7 +2074,7 @@
           <a:p>
             <a:fld id="{FB5A2253-BBB7-4B79-BA99-3A2583E1B15B}" type="datetimeFigureOut">
               <a:rPr lang="hu-HU" smtClean="0"/>
-              <a:t>2026. 04. 28.</a:t>
+              <a:t>2026. 05. 04.</a:t>
             </a:fld>
             <a:endParaRPr lang="hu-HU"/>
           </a:p>
@@ -2385,7 +2385,7 @@
           <a:p>
             <a:fld id="{FB5A2253-BBB7-4B79-BA99-3A2583E1B15B}" type="datetimeFigureOut">
               <a:rPr lang="hu-HU" smtClean="0"/>
-              <a:t>2026. 04. 28.</a:t>
+              <a:t>2026. 05. 04.</a:t>
             </a:fld>
             <a:endParaRPr lang="hu-HU"/>
           </a:p>
@@ -2673,7 +2673,7 @@
           <a:p>
             <a:fld id="{FB5A2253-BBB7-4B79-BA99-3A2583E1B15B}" type="datetimeFigureOut">
               <a:rPr lang="hu-HU" smtClean="0"/>
-              <a:t>2026. 04. 28.</a:t>
+              <a:t>2026. 05. 04.</a:t>
             </a:fld>
             <a:endParaRPr lang="hu-HU"/>
           </a:p>
@@ -2914,7 +2914,7 @@
           <a:p>
             <a:fld id="{FB5A2253-BBB7-4B79-BA99-3A2583E1B15B}" type="datetimeFigureOut">
               <a:rPr lang="hu-HU" smtClean="0"/>
-              <a:t>2026. 04. 28.</a:t>
+              <a:t>2026. 05. 04.</a:t>
             </a:fld>
             <a:endParaRPr lang="hu-HU"/>
           </a:p>
@@ -3742,6 +3742,9 @@
   <p:clrMapOvr>
     <a:masterClrMapping/>
   </p:clrMapOvr>
+  <p:transition spd="slow">
+    <p:wipe/>
+  </p:transition>
   <p:timing>
     <p:tnLst>
       <p:par>
@@ -4649,6 +4652,9 @@
   <p:clrMapOvr>
     <a:masterClrMapping/>
   </p:clrMapOvr>
+  <p:transition spd="slow">
+    <p:wipe/>
+  </p:transition>
   <p:timing>
     <p:tnLst>
       <p:par>
@@ -5036,16 +5042,13 @@
                   <a:schemeClr val="bg1"/>
                 </a:solidFill>
               </a:rPr>
-              <a:t>Képernyő méret és</a:t>
-            </a:r>
-            <a:r>
-              <a:rPr lang="hu-HU" dirty="0">
-                <a:solidFill>
-                  <a:schemeClr val="bg1"/>
-                </a:solidFill>
-              </a:rPr>
-              <a:t> nagyítás alapján állítani a minimum ablakméretet</a:t>
-            </a:r>
+              <a:t>Menü ablakának módosítása</a:t>
+            </a:r>
+            <a:endParaRPr lang="hu-HU" dirty="0">
+              <a:solidFill>
+                <a:schemeClr val="bg1"/>
+              </a:solidFill>
+            </a:endParaRPr>
           </a:p>
           <a:p>
             <a:r>
@@ -5097,6 +5100,283 @@
   <p:clrMapOvr>
     <a:masterClrMapping/>
   </p:clrMapOvr>
+  <p:transition spd="slow">
+    <p:wipe/>
+  </p:transition>
+  <p:timing>
+    <p:tnLst>
+      <p:par>
+        <p:cTn id="1" dur="indefinite" restart="never" nodeType="tmRoot">
+          <p:childTnLst>
+            <p:seq concurrent="1" nextAc="seek">
+              <p:cTn id="2" dur="indefinite" nodeType="mainSeq">
+                <p:childTnLst>
+                  <p:par>
+                    <p:cTn id="3" fill="hold">
+                      <p:stCondLst>
+                        <p:cond delay="indefinite"/>
+                      </p:stCondLst>
+                      <p:childTnLst>
+                        <p:par>
+                          <p:cTn id="4" fill="hold">
+                            <p:stCondLst>
+                              <p:cond delay="0"/>
+                            </p:stCondLst>
+                            <p:childTnLst>
+                              <p:par>
+                                <p:cTn id="5" presetID="10" presetClass="entr" presetSubtype="0" fill="hold" nodeType="clickEffect">
+                                  <p:stCondLst>
+                                    <p:cond delay="0"/>
+                                  </p:stCondLst>
+                                  <p:childTnLst>
+                                    <p:set>
+                                      <p:cBhvr>
+                                        <p:cTn id="6" dur="1" fill="hold">
+                                          <p:stCondLst>
+                                            <p:cond delay="0"/>
+                                          </p:stCondLst>
+                                        </p:cTn>
+                                        <p:tgtEl>
+                                          <p:spTgt spid="4">
+                                            <p:txEl>
+                                              <p:pRg st="0" end="0"/>
+                                            </p:txEl>
+                                          </p:spTgt>
+                                        </p:tgtEl>
+                                        <p:attrNameLst>
+                                          <p:attrName>style.visibility</p:attrName>
+                                        </p:attrNameLst>
+                                      </p:cBhvr>
+                                      <p:to>
+                                        <p:strVal val="visible"/>
+                                      </p:to>
+                                    </p:set>
+                                    <p:animEffect transition="in" filter="fade">
+                                      <p:cBhvr>
+                                        <p:cTn id="7" dur="500"/>
+                                        <p:tgtEl>
+                                          <p:spTgt spid="4">
+                                            <p:txEl>
+                                              <p:pRg st="0" end="0"/>
+                                            </p:txEl>
+                                          </p:spTgt>
+                                        </p:tgtEl>
+                                      </p:cBhvr>
+                                    </p:animEffect>
+                                  </p:childTnLst>
+                                </p:cTn>
+                              </p:par>
+                            </p:childTnLst>
+                          </p:cTn>
+                        </p:par>
+                      </p:childTnLst>
+                    </p:cTn>
+                  </p:par>
+                  <p:par>
+                    <p:cTn id="8" fill="hold">
+                      <p:stCondLst>
+                        <p:cond delay="indefinite"/>
+                      </p:stCondLst>
+                      <p:childTnLst>
+                        <p:par>
+                          <p:cTn id="9" fill="hold">
+                            <p:stCondLst>
+                              <p:cond delay="0"/>
+                            </p:stCondLst>
+                            <p:childTnLst>
+                              <p:par>
+                                <p:cTn id="10" presetID="10" presetClass="entr" presetSubtype="0" fill="hold" nodeType="clickEffect">
+                                  <p:stCondLst>
+                                    <p:cond delay="0"/>
+                                  </p:stCondLst>
+                                  <p:childTnLst>
+                                    <p:set>
+                                      <p:cBhvr>
+                                        <p:cTn id="11" dur="1" fill="hold">
+                                          <p:stCondLst>
+                                            <p:cond delay="0"/>
+                                          </p:stCondLst>
+                                        </p:cTn>
+                                        <p:tgtEl>
+                                          <p:spTgt spid="4">
+                                            <p:txEl>
+                                              <p:pRg st="1" end="1"/>
+                                            </p:txEl>
+                                          </p:spTgt>
+                                        </p:tgtEl>
+                                        <p:attrNameLst>
+                                          <p:attrName>style.visibility</p:attrName>
+                                        </p:attrNameLst>
+                                      </p:cBhvr>
+                                      <p:to>
+                                        <p:strVal val="visible"/>
+                                      </p:to>
+                                    </p:set>
+                                    <p:animEffect transition="in" filter="fade">
+                                      <p:cBhvr>
+                                        <p:cTn id="12" dur="500"/>
+                                        <p:tgtEl>
+                                          <p:spTgt spid="4">
+                                            <p:txEl>
+                                              <p:pRg st="1" end="1"/>
+                                            </p:txEl>
+                                          </p:spTgt>
+                                        </p:tgtEl>
+                                      </p:cBhvr>
+                                    </p:animEffect>
+                                  </p:childTnLst>
+                                </p:cTn>
+                              </p:par>
+                            </p:childTnLst>
+                          </p:cTn>
+                        </p:par>
+                      </p:childTnLst>
+                    </p:cTn>
+                  </p:par>
+                  <p:par>
+                    <p:cTn id="13" fill="hold">
+                      <p:stCondLst>
+                        <p:cond delay="indefinite"/>
+                      </p:stCondLst>
+                      <p:childTnLst>
+                        <p:par>
+                          <p:cTn id="14" fill="hold">
+                            <p:stCondLst>
+                              <p:cond delay="0"/>
+                            </p:stCondLst>
+                            <p:childTnLst>
+                              <p:par>
+                                <p:cTn id="15" presetID="10" presetClass="entr" presetSubtype="0" fill="hold" nodeType="clickEffect">
+                                  <p:stCondLst>
+                                    <p:cond delay="0"/>
+                                  </p:stCondLst>
+                                  <p:childTnLst>
+                                    <p:set>
+                                      <p:cBhvr>
+                                        <p:cTn id="16" dur="1" fill="hold">
+                                          <p:stCondLst>
+                                            <p:cond delay="0"/>
+                                          </p:stCondLst>
+                                        </p:cTn>
+                                        <p:tgtEl>
+                                          <p:spTgt spid="4">
+                                            <p:txEl>
+                                              <p:pRg st="2" end="2"/>
+                                            </p:txEl>
+                                          </p:spTgt>
+                                        </p:tgtEl>
+                                        <p:attrNameLst>
+                                          <p:attrName>style.visibility</p:attrName>
+                                        </p:attrNameLst>
+                                      </p:cBhvr>
+                                      <p:to>
+                                        <p:strVal val="visible"/>
+                                      </p:to>
+                                    </p:set>
+                                    <p:animEffect transition="in" filter="fade">
+                                      <p:cBhvr>
+                                        <p:cTn id="17" dur="500"/>
+                                        <p:tgtEl>
+                                          <p:spTgt spid="4">
+                                            <p:txEl>
+                                              <p:pRg st="2" end="2"/>
+                                            </p:txEl>
+                                          </p:spTgt>
+                                        </p:tgtEl>
+                                      </p:cBhvr>
+                                    </p:animEffect>
+                                  </p:childTnLst>
+                                </p:cTn>
+                              </p:par>
+                            </p:childTnLst>
+                          </p:cTn>
+                        </p:par>
+                      </p:childTnLst>
+                    </p:cTn>
+                  </p:par>
+                  <p:par>
+                    <p:cTn id="18" fill="hold">
+                      <p:stCondLst>
+                        <p:cond delay="indefinite"/>
+                      </p:stCondLst>
+                      <p:childTnLst>
+                        <p:par>
+                          <p:cTn id="19" fill="hold">
+                            <p:stCondLst>
+                              <p:cond delay="0"/>
+                            </p:stCondLst>
+                            <p:childTnLst>
+                              <p:par>
+                                <p:cTn id="20" presetID="10" presetClass="entr" presetSubtype="0" fill="hold" nodeType="clickEffect">
+                                  <p:stCondLst>
+                                    <p:cond delay="0"/>
+                                  </p:stCondLst>
+                                  <p:childTnLst>
+                                    <p:set>
+                                      <p:cBhvr>
+                                        <p:cTn id="21" dur="1" fill="hold">
+                                          <p:stCondLst>
+                                            <p:cond delay="0"/>
+                                          </p:stCondLst>
+                                        </p:cTn>
+                                        <p:tgtEl>
+                                          <p:spTgt spid="4">
+                                            <p:txEl>
+                                              <p:pRg st="3" end="3"/>
+                                            </p:txEl>
+                                          </p:spTgt>
+                                        </p:tgtEl>
+                                        <p:attrNameLst>
+                                          <p:attrName>style.visibility</p:attrName>
+                                        </p:attrNameLst>
+                                      </p:cBhvr>
+                                      <p:to>
+                                        <p:strVal val="visible"/>
+                                      </p:to>
+                                    </p:set>
+                                    <p:animEffect transition="in" filter="fade">
+                                      <p:cBhvr>
+                                        <p:cTn id="22" dur="500"/>
+                                        <p:tgtEl>
+                                          <p:spTgt spid="4">
+                                            <p:txEl>
+                                              <p:pRg st="3" end="3"/>
+                                            </p:txEl>
+                                          </p:spTgt>
+                                        </p:tgtEl>
+                                      </p:cBhvr>
+                                    </p:animEffect>
+                                  </p:childTnLst>
+                                </p:cTn>
+                              </p:par>
+                            </p:childTnLst>
+                          </p:cTn>
+                        </p:par>
+                      </p:childTnLst>
+                    </p:cTn>
+                  </p:par>
+                </p:childTnLst>
+              </p:cTn>
+              <p:prevCondLst>
+                <p:cond evt="onPrev" delay="0">
+                  <p:tgtEl>
+                    <p:sldTgt/>
+                  </p:tgtEl>
+                </p:cond>
+              </p:prevCondLst>
+              <p:nextCondLst>
+                <p:cond evt="onNext" delay="0">
+                  <p:tgtEl>
+                    <p:sldTgt/>
+                  </p:tgtEl>
+                </p:cond>
+              </p:nextCondLst>
+            </p:seq>
+          </p:childTnLst>
+        </p:cTn>
+      </p:par>
+    </p:tnLst>
+  </p:timing>
 </p:sld>
 </file>
 
@@ -5198,6 +5478,9 @@
   <p:clrMapOvr>
     <a:masterClrMapping/>
   </p:clrMapOvr>
+  <p:transition spd="slow">
+    <p:wipe/>
+  </p:transition>
 </p:sld>
 </file>
 
@@ -5307,6 +5590,9 @@
   <p:clrMapOvr>
     <a:masterClrMapping/>
   </p:clrMapOvr>
+  <p:transition spd="slow">
+    <p:wipe/>
+  </p:transition>
 </p:sld>
 </file>
 
